--- a/docs/pitch/motion/deck.pptx
+++ b/docs/pitch/motion/deck.pptx
@@ -728,7 +728,7 @@
           </a:p>
           <a:p xmlns:a="http://schemas.openxmlformats.org/drawingml/2006/main">
             <a:r>
-              <a:t>Architecture flow: Game API; one team key, shared rate budget; Railway services taker, maker, duels and MCP; Jev and LLM deciders; guardrails and human approval; Postgres/pgvector RAG and Phoenix traces; Bazaar Live and ElevenLabs. Memory and traces feed decisions; voice observes public activity.</a:t>
+              <a:t>Architecture flow: Game API; one team key, shared rate budget; Railway services taker, maker, duels and MCP; Jev and LLM deciders; guardrails and value caps; Postgres/pgvector RAG and Phoenix traces; Bazaar Live and ElevenLabs. Memory and traces feed decisions; voice observes public activity.</a:t>
             </a:r>
           </a:p>
           <a:p xmlns:a="http://schemas.openxmlformats.org/drawingml/2006/main">
@@ -813,7 +813,7 @@
           </a:p>
           <a:p xmlns:a="http://schemas.openxmlformats.org/drawingml/2006/main">
             <a:r>
-              <a:t>We use models where they help: interpreting requests, advice and language. Code enforces every binding action. Jev can say undecided, and the safe default remains. A shared ledger coordinates accepts. Larger trades require human approval. PAUSE stops writes. We protect the last copy of a page card. Those limits live in inspectable policy and code.</a:t>
+              <a:t>We use models where they help: interpreting requests, advice and language. Code enforces every binding action. Jev can say undecided, and the safe default remains. A shared ledger coordinates accepts. Every card buy is capped at its official value. PAUSE stops writes. We protect the last copy of a page card. Those limits live in inspectable policy and code.</a:t>
             </a:r>
           </a:p>
           <a:p xmlns:a="http://schemas.openxmlformats.org/drawingml/2006/main">
@@ -828,7 +828,7 @@
           </a:p>
           <a:p xmlns:a="http://schemas.openxmlformats.org/drawingml/2006/main">
             <a:r>
-              <a:t>Sources: claims C1–C4; GUARDRAILS.md; AGENTS.md selling hard rules. The approval threshold is intentionally unnamed because the supplied policy and contract differ.</a:t>
+              <a:t>Sources: claims C1–C4, C69; GUARDRAILS.md official_value_margin; AGENTS.md selling hard rules. Amount-based human approval is off since Sun 4 Oct (human_approval_above = 0), so it is not claimed.</a:t>
             </a:r>
           </a:p>
           <a:p xmlns:a="http://schemas.openxmlformats.org/drawingml/2006/main">
@@ -4625,7 +4625,7 @@
                 <a:ea typeface="Arial"/>
                 <a:cs typeface="Arial"/>
               </a:rPr>
-              <a:t>Approval</a:t>
+              <a:t>Value cap</a:t>
             </a:r>
           </a:p>
         </p:txBody>
